--- a/canvas_material/lectures/powerpoint/Session11-DesignDocs.pptx
+++ b/canvas_material/lectures/powerpoint/Session11-DesignDocs.pptx
@@ -605,7 +605,7 @@
           <a:p>
             <a:r>
               <a:rPr lang="en-US" dirty="0"/>
-              <a:t>Two minutes. Walk the headings, don't read them — they map one-to-one onto the CP5 rubric criteria, which is the point: a reviewer always knows where to look, and a missing alternatives section is visible instantly. Say why every organization that takes design docs seriously has a template, and that conforming to one is part of the job rather than a course quirk. Point out the status line, revision history, and sign-off table as the lightweight version of what they just saw in GSSC-0012.</a:t>
+              <a:t>Two minutes. Walk the headings, don't read them — they map one-to-one onto the Design Document rubric criteria, which is the point: a reviewer always knows where to look, and a missing alternatives section is visible instantly. Say why every organization that takes design docs seriously has a template, and that conforming to one is part of the job rather than a course quirk. Point out the status line, revision history, and sign-off table as the lightweight version of what they just saw in GSSC-0012.</a:t>
             </a:r>
             <a:endParaRPr lang="en-US" dirty="0"/>
           </a:p>
@@ -869,7 +869,7 @@
           <a:p>
             <a:r>
               <a:rPr lang="en-US" dirty="0"/>
-              <a:t>Ten minutes, and the goal is a page of boxes, not a finished diagram. Circulate with two questions: what does this system depend on that you don't control, and where does the data live? Teams that can't name two real decisions usually haven't found their risky part yet — send them back to their proposal's risks and spike. Say clearly that Wednesday's workshop produces the draft and the draft is due at the end of that class, so today's sketch is the thing that makes Wednesday survivable.</a:t>
+              <a:t>Ten minutes, and the goal is a page of boxes, not a finished diagram. Circulate with two questions: what does this system depend on that you don't control, and where does the data live? Teams that can't name two real decisions usually haven't found their risky part yet — send them back to their proposal's risks and spike. Say clearly that Wednesday's workshop produces the draft, which is then due end of day Thursday — the boards are the work and Thursday night is transcription — so today's sketch is the thing that makes Wednesday survivable.</a:t>
             </a:r>
             <a:endParaRPr lang="en-US" dirty="0"/>
           </a:p>
@@ -1045,7 +1045,7 @@
           <a:p>
             <a:r>
               <a:rPr lang="en-US" dirty="0"/>
-              <a:t>Five minutes, and only these two questions — they are the ones teams skip when left alone and the ones worth your coaching. Circulate while they talk: the team that says "we'll all do everything and communicate constantly" is the one that fails in Week 10, so push it for a named tiebreaker and a real response time. Deciding the deadlock rule now takes four minutes; deciding it during the deadlock costs a week. Solo students answer the abbreviated version on the same worksheet — the solo box says which sections. Then set the expectation out loud: the rest of the charter is the agenda for a first team meeting held before Wednesday, and the finished charter is due end of day Wednesday alongside the design-doc draft.</a:t>
+              <a:t>Five minutes, and only these two questions — they are the ones teams skip when left alone and the ones worth your coaching. Circulate while they talk: the team that says "we'll all do everything and communicate constantly" is the one that fails in Week 10, so push it for a named tiebreaker and a real response time. Deciding the deadlock rule now takes four minutes; deciding it during the deadlock costs a week. Solo students answer the abbreviated version on the same worksheet — the solo box says which sections. Then set the expectation out loud: the rest of the charter is the agenda for a first team meeting held before Wednesday, and the finished charter is due end of day Wednesday. The design-doc draft is a day behind it, Thursday, so the two do not land on the same evening.</a:t>
             </a:r>
             <a:endParaRPr lang="en-US" dirty="0"/>
           </a:p>
@@ -1133,7 +1133,7 @@
           <a:p>
             <a:r>
               <a:rPr lang="en-US" dirty="0"/>
-              <a:t>Close in two minutes. The one-liner at the top is the session in a sentence — say it, then the logistics. Charter tonight, skeleton Wednesday, draft due at the end of Wednesday's workshop, CP5 a week later. Name the loop out loud: draft, review, revise, exactly as with the proposal, because revision is graded here too. If the room looks daunted, remind them Wednesday is three-quarters whiteboard time with you circulating as design reviewer.</a:t>
+              <a:t>Close in two minutes. The one-liner at the top is the session in a sentence — say it, then the logistics. Charter finished at the first team meeting and submitted end of day Wednesday, skeleton sketch brought Wednesday, draft due end of day Thursday, the revised Design Document a week later. Name the loop out loud: draft, review, revise, exactly as with the proposal, because revision is graded here too. If the room looks daunted, remind them Wednesday is three-quarters whiteboard time with you circulating as design reviewer.</a:t>
             </a:r>
             <a:endParaRPr lang="en-US" dirty="0"/>
           </a:p>
@@ -2519,7 +2519,7 @@
                 <a:ea typeface="Calibri" pitchFamily="34" charset="-122"/>
                 <a:cs typeface="Calibri" pitchFamily="34" charset="-120"/>
               </a:rPr>
-              <a:t>THE TEMPLATE — REQUIRED FOR CP5</a:t>
+              <a:t>THE TEMPLATE — REQUIRED FOR THE DESIGN DOCUMENT</a:t>
             </a:r>
             <a:endParaRPr lang="en-US" sz="1400" dirty="0"/>
           </a:p>
@@ -6901,7 +6901,7 @@
                 <a:ea typeface="Calibri" pitchFamily="34" charset="-122"/>
                 <a:cs typeface="Calibri" pitchFamily="34" charset="-120"/>
               </a:rPr>
-              <a:t>Bring this Wednesday. The workshop turns it into the draft — due at the end of that class.</a:t>
+              <a:t>Bring this Wednesday. The workshop turns it into the draft — due end of day Thursday, Oct 15.</a:t>
             </a:r>
             <a:endParaRPr lang="en-US" sz="1500" dirty="0"/>
           </a:p>
@@ -8604,7 +8604,7 @@
                 <a:ea typeface="Calibri" pitchFamily="34" charset="-122"/>
                 <a:cs typeface="Calibri" pitchFamily="34" charset="-120"/>
               </a:rPr>
-              <a:t>Wednesday is a whiteboard workshop — the design doc draft is due at the end of it</a:t>
+              <a:t>Wednesday is a whiteboard workshop — the design doc draft is due end of day Thursday, Oct 15</a:t>
             </a:r>
             <a:endParaRPr lang="en-US" sz="1600" dirty="0"/>
           </a:p>
@@ -8672,7 +8672,7 @@
                 <a:ea typeface="Calibri" pitchFamily="34" charset="-122"/>
                 <a:cs typeface="Calibri" pitchFamily="34" charset="-120"/>
               </a:rPr>
-              <a:t>CP5 — the revised design doc — is due Wed, Oct 21. Draft, review, revise: the same loop as the proposal.</a:t>
+              <a:t>CP5 — Design Document (revised) — is due Wed, Oct 21. Draft, review, revise: the same loop as the proposal.</a:t>
             </a:r>
             <a:endParaRPr lang="en-US" sz="1550" dirty="0"/>
           </a:p>

--- a/canvas_material/lectures/powerpoint/Session11-DesignDocs.pptx
+++ b/canvas_material/lectures/powerpoint/Session11-DesignDocs.pptx
@@ -1045,7 +1045,7 @@
           <a:p>
             <a:r>
               <a:rPr lang="en-US" dirty="0"/>
-              <a:t>Five minutes, and only these two questions — they are the ones teams skip when left alone and the ones worth your coaching. Circulate while they talk: the team that says "we'll all do everything and communicate constantly" is the one that fails in Week 10, so push it for a named tiebreaker and a real response time. Deciding the deadlock rule now takes four minutes; deciding it during the deadlock costs a week. Solo students answer the abbreviated version on the same worksheet — the solo box says which sections. Then set the expectation out loud: the rest of the charter is the agenda for a first team meeting held before Wednesday, and the finished charter is due end of day Wednesday. The design-doc draft is a day behind it, Thursday, so the two do not land on the same evening.</a:t>
+              <a:t>Five minutes, and only these two questions — they are the ones teams skip when left alone and the ones worth your coaching. Circulate while they talk: the team that says "we'll all do everything and communicate constantly" is the one that fails in Week 10, so push it for a named tiebreaker and a real response time. Deciding the deadlock rule now takes four minutes; deciding it during the deadlock costs a week. Solo students answer the abbreviated version on the same worksheet — the solo box says which sections. Then set the expectation out loud: the rest of the charter is the agenda for a first team meeting held before Wednesday, and that meeting starts by creating the project's GitHub organization and public repository — the Canvas guide, Starting Your Project Repository, walks through it. The finished charter carries the repository URL and is submitted end of day Wednesday — it does not go in the repo: it's an internal agreement among teammates, and the public parts of it become the governance docs in the Infrastructure Package. The design-doc draft is a day behind it, Thursday, so the two do not land on the same evening.</a:t>
             </a:r>
             <a:endParaRPr lang="en-US" dirty="0"/>
           </a:p>
@@ -1133,7 +1133,7 @@
           <a:p>
             <a:r>
               <a:rPr lang="en-US" dirty="0"/>
-              <a:t>Close in two minutes. The one-liner at the top is the session in a sentence — say it, then the logistics. Charter finished at the first team meeting and submitted end of day Wednesday, skeleton sketch brought Wednesday, draft due end of day Thursday, the revised Design Document a week later. Name the loop out loud: draft, review, revise, exactly as with the proposal, because revision is graded here too. If the room looks daunted, remind them Wednesday is three-quarters whiteboard time with you circulating as design reviewer.</a:t>
+              <a:t>Close in two minutes. The one-liner at the top is the session in a sentence — say it, then the logistics. The first team meeting creates the repository before anything else — a GitHub organization named for the project, at least two owners, a public repo with a README paragraph, a .gitignore, and their working license — and nothing private goes in it, ever: no keys, no interview notes — and not the charter either, which stays with the team. Charter finished at that meeting and submitted end of day Wednesday with the repo URL in it; skeleton sketch brought Wednesday, draft due end of day Thursday, the revised Design Document a week later. Name the loop out loud: draft, review, revise, exactly as with the proposal, because revision is graded here too. If the room looks daunted, remind them Wednesday is three-quarters whiteboard time with you circulating as design reviewer.</a:t>
             </a:r>
             <a:endParaRPr lang="en-US" dirty="0"/>
           </a:p>
@@ -8246,7 +8246,7 @@
                 <a:ea typeface="Calibri" pitchFamily="34" charset="-122"/>
                 <a:cs typeface="Calibri" pitchFamily="34" charset="-120"/>
               </a:rPr>
-              <a:t>Finish the charter at your first team meeting. Submit by end of day Wednesday.</a:t>
+              <a:t>First team meeting: create the project's repo, then finish the charter. Submit it, with the repo URL, by Wednesday.</a:t>
             </a:r>
             <a:endParaRPr lang="en-US" sz="1500" dirty="0"/>
           </a:p>
@@ -8544,7 +8544,28 @@
                 <a:ea typeface="Calibri" pitchFamily="34" charset="-122"/>
                 <a:cs typeface="Calibri" pitchFamily="34" charset="-120"/>
               </a:rPr>
-              <a:t>Hold your first team meeting — finish the charter there, submit by end of day Wednesday</a:t>
+              <a:t>First team meeting: create the project's GitHub organization and public repo (Canvas → Starting Your Project Repository)</a:t>
+            </a:r>
+            <a:endParaRPr lang="en-US" sz="1600" dirty="0"/>
+          </a:p>
+          <a:p>
+            <a:pPr marL="203200" indent="-203200">
+              <a:spcAft>
+                <a:spcPts val="700"/>
+              </a:spcAft>
+              <a:buSzPct val="100000"/>
+              <a:buChar char="•"/>
+            </a:pPr>
+            <a:r>
+              <a:rPr lang="en-US" sz="1600" dirty="0">
+                <a:solidFill>
+                  <a:srgbClr val="CBD8E6"/>
+                </a:solidFill>
+                <a:latin typeface="Calibri" pitchFamily="34" charset="0"/>
+                <a:ea typeface="Calibri" pitchFamily="34" charset="-122"/>
+                <a:cs typeface="Calibri" pitchFamily="34" charset="-120"/>
+              </a:rPr>
+              <a:t>Finish the charter there, with the repo URL in it — submit it by end of day Wednesday</a:t>
             </a:r>
             <a:endParaRPr lang="en-US" sz="1600" dirty="0"/>
           </a:p>

--- a/canvas_material/lectures/powerpoint/Session11-DesignDocs.pptx
+++ b/canvas_material/lectures/powerpoint/Session11-DesignDocs.pptx
@@ -3908,6 +3908,38 @@
               <a:t>10</a:t>
             </a:r>
             <a:endParaRPr lang="en-US" sz="1000" dirty="0"/>
+          </a:p>
+        </p:txBody>
+      </p:sp>
+      <p:sp>
+        <p:nvSpPr>
+          <p:cNvPr id="45" name="TextBox 44">
+            <a:extLst>
+              <a:ext uri="{FF2B5EF4-FFF2-40B4-BE49-F238E27FC236}">
+                <a16:creationId xmlns:a16="http://schemas.microsoft.com/office/drawing/2014/main" id="{5A254B10-DE2C-9D48-1930-4CF31CA624A4}"/>
+              </a:ext>
+            </a:extLst>
+          </p:cNvPr>
+          <p:cNvSpPr txBox="1"/>
+          <p:nvPr/>
+        </p:nvSpPr>
+        <p:spPr>
+          <a:xfrm>
+            <a:off x="9816353" y="934571"/>
+            <a:ext cx="184731" cy="369332"/>
+          </a:xfrm>
+          <a:prstGeom prst="rect">
+            <a:avLst/>
+          </a:prstGeom>
+          <a:noFill/>
+        </p:spPr>
+        <p:txBody>
+          <a:bodyPr wrap="none" rtlCol="0">
+            <a:spAutoFit/>
+          </a:bodyPr>
+          <a:lstStyle/>
+          <a:p>
+            <a:endParaRPr lang="en-US" dirty="0"/>
           </a:p>
         </p:txBody>
       </p:sp>
